--- a/Backend/services/pptx-generator-service/slides/quadra_poli/secao_acessorio_basquete_adulto_hidraulica.pptx
+++ b/Backend/services/pptx-generator-service/slides/quadra_poli/secao_acessorio_basquete_adulto_hidraulica.pptx
@@ -115,7 +115,7 @@
 <file path=ppt/revisionInfo.xml><?xml version="1.0" encoding="utf-8"?>
 <p1510:revInfo xmlns:a="http://schemas.openxmlformats.org/drawingml/2006/main" xmlns:r="http://schemas.openxmlformats.org/officeDocument/2006/relationships" xmlns:p1510="http://schemas.microsoft.com/office/powerpoint/2015/10/main">
   <p1510:revLst>
-    <p1510:client id="{0AF677FF-3219-282B-C7C4-73BDC4D42183}" v="74" dt="2026-05-20T12:23:15.945"/>
+    <p1510:client id="{184CE801-7C1D-C304-A6E4-E5A486D943CD}" v="3" dt="2026-05-26T23:39:06.673"/>
   </p1510:revLst>
 </p1510:revInfo>
 </file>
@@ -251,7 +251,7 @@
           <a:p>
             <a:fld id="{F0E51C7C-CEA3-4CAA-BE4B-344879E7C377}" type="datetimeFigureOut">
               <a:rPr lang="de-DE" smtClean="0"/>
-              <a:t>20.05.2026</a:t>
+              <a:t>26.05.2026</a:t>
             </a:fld>
             <a:endParaRPr lang="de-DE"/>
           </a:p>
@@ -421,7 +421,7 @@
           <a:p>
             <a:fld id="{F0E51C7C-CEA3-4CAA-BE4B-344879E7C377}" type="datetimeFigureOut">
               <a:rPr lang="de-DE" smtClean="0"/>
-              <a:t>20.05.2026</a:t>
+              <a:t>26.05.2026</a:t>
             </a:fld>
             <a:endParaRPr lang="de-DE"/>
           </a:p>
@@ -601,7 +601,7 @@
           <a:p>
             <a:fld id="{F0E51C7C-CEA3-4CAA-BE4B-344879E7C377}" type="datetimeFigureOut">
               <a:rPr lang="de-DE" smtClean="0"/>
-              <a:t>20.05.2026</a:t>
+              <a:t>26.05.2026</a:t>
             </a:fld>
             <a:endParaRPr lang="de-DE"/>
           </a:p>
@@ -771,7 +771,7 @@
           <a:p>
             <a:fld id="{F0E51C7C-CEA3-4CAA-BE4B-344879E7C377}" type="datetimeFigureOut">
               <a:rPr lang="de-DE" smtClean="0"/>
-              <a:t>20.05.2026</a:t>
+              <a:t>26.05.2026</a:t>
             </a:fld>
             <a:endParaRPr lang="de-DE"/>
           </a:p>
@@ -1017,7 +1017,7 @@
           <a:p>
             <a:fld id="{F0E51C7C-CEA3-4CAA-BE4B-344879E7C377}" type="datetimeFigureOut">
               <a:rPr lang="de-DE" smtClean="0"/>
-              <a:t>20.05.2026</a:t>
+              <a:t>26.05.2026</a:t>
             </a:fld>
             <a:endParaRPr lang="de-DE"/>
           </a:p>
@@ -1249,7 +1249,7 @@
           <a:p>
             <a:fld id="{F0E51C7C-CEA3-4CAA-BE4B-344879E7C377}" type="datetimeFigureOut">
               <a:rPr lang="de-DE" smtClean="0"/>
-              <a:t>20.05.2026</a:t>
+              <a:t>26.05.2026</a:t>
             </a:fld>
             <a:endParaRPr lang="de-DE"/>
           </a:p>
@@ -1616,7 +1616,7 @@
           <a:p>
             <a:fld id="{F0E51C7C-CEA3-4CAA-BE4B-344879E7C377}" type="datetimeFigureOut">
               <a:rPr lang="de-DE" smtClean="0"/>
-              <a:t>20.05.2026</a:t>
+              <a:t>26.05.2026</a:t>
             </a:fld>
             <a:endParaRPr lang="de-DE"/>
           </a:p>
@@ -1734,7 +1734,7 @@
           <a:p>
             <a:fld id="{F0E51C7C-CEA3-4CAA-BE4B-344879E7C377}" type="datetimeFigureOut">
               <a:rPr lang="de-DE" smtClean="0"/>
-              <a:t>20.05.2026</a:t>
+              <a:t>26.05.2026</a:t>
             </a:fld>
             <a:endParaRPr lang="de-DE"/>
           </a:p>
@@ -1829,7 +1829,7 @@
           <a:p>
             <a:fld id="{F0E51C7C-CEA3-4CAA-BE4B-344879E7C377}" type="datetimeFigureOut">
               <a:rPr lang="de-DE" smtClean="0"/>
-              <a:t>20.05.2026</a:t>
+              <a:t>26.05.2026</a:t>
             </a:fld>
             <a:endParaRPr lang="de-DE"/>
           </a:p>
@@ -2106,7 +2106,7 @@
           <a:p>
             <a:fld id="{F0E51C7C-CEA3-4CAA-BE4B-344879E7C377}" type="datetimeFigureOut">
               <a:rPr lang="de-DE" smtClean="0"/>
-              <a:t>20.05.2026</a:t>
+              <a:t>26.05.2026</a:t>
             </a:fld>
             <a:endParaRPr lang="de-DE"/>
           </a:p>
@@ -2359,7 +2359,7 @@
           <a:p>
             <a:fld id="{F0E51C7C-CEA3-4CAA-BE4B-344879E7C377}" type="datetimeFigureOut">
               <a:rPr lang="de-DE" smtClean="0"/>
-              <a:t>20.05.2026</a:t>
+              <a:t>26.05.2026</a:t>
             </a:fld>
             <a:endParaRPr lang="de-DE"/>
           </a:p>
@@ -2572,7 +2572,7 @@
           <a:p>
             <a:fld id="{F0E51C7C-CEA3-4CAA-BE4B-344879E7C377}" type="datetimeFigureOut">
               <a:rPr lang="de-DE" smtClean="0"/>
-              <a:t>20.05.2026</a:t>
+              <a:t>26.05.2026</a:t>
             </a:fld>
             <a:endParaRPr lang="de-DE"/>
           </a:p>
@@ -3209,10 +3209,10 @@
             <a:r>
               <a:rPr lang="pt-BR" sz="1200">
                 <a:latin typeface="Poppins"/>
-                <a:ea typeface="Times New Roman" panose="02020603050405020304" pitchFamily="18" charset="0"/>
+                <a:ea typeface="+mn-lt"/>
                 <a:cs typeface="Poppins"/>
               </a:rPr>
-              <a:t>Estruturas hidráulica...</a:t>
+              <a:t>Tabela de basquete oficial nos campeonatos da NBB. Segurança e durabilidade confiável. Estrutura e estabilidade reforçada. Quando a tabela é levantada as sapatas se fixam no chão para garantir mais estabilidade e segurança ao atleta.</a:t>
             </a:r>
             <a:endParaRPr lang="pt-BR" sz="1200" b="1">
               <a:latin typeface="Poppins"/>
